--- a/PowerPoint-Vorlage_HMKB.pptx
+++ b/PowerPoint-Vorlage_HMKB.pptx
@@ -5,8 +5,14 @@
     <p:sldMasterId id="2147483654" r:id="rId4"/>
   </p:sldMasterIdLst>
   <p:notesMasterIdLst>
-    <p:notesMasterId r:id="rId5"/>
+    <p:notesMasterId r:id="rId9"/>
   </p:notesMasterIdLst>
+  <p:sldIdLst>
+    <p:sldId id="256" r:id="rId5"/>
+    <p:sldId id="257" r:id="rId6"/>
+    <p:sldId id="258" r:id="rId7"/>
+    <p:sldId id="259" r:id="rId8"/>
+  </p:sldIdLst>
   <p:sldSz cx="9144000" cy="5143500" type="screen16x9"/>
   <p:notesSz cx="6858000" cy="9144000"/>
   <p:defaultTextStyle>
@@ -1507,7 +1513,7 @@
             </a:pPr>
             <a:fld id="{52FB9BE8-06FC-498B-A6B6-27E04BB94BBC}" type="datetime1">
               <a:rPr lang="de-DE" smtClean="0"/>
-              <a:t>16.04.2025</a:t>
+              <a:t>11.03.2026</a:t>
             </a:fld>
             <a:endParaRPr lang="de-DE" dirty="0"/>
           </a:p>
@@ -1618,7 +1624,7 @@
             </a:pPr>
             <a:fld id="{7ABC6915-E11F-44E2-A087-31E6B6A359CE}" type="datetime1">
               <a:rPr lang="de-DE" smtClean="0"/>
-              <a:t>16.04.2025</a:t>
+              <a:t>11.03.2026</a:t>
             </a:fld>
             <a:endParaRPr lang="de-DE" dirty="0"/>
           </a:p>
@@ -1978,7 +1984,7 @@
             </a:pPr>
             <a:fld id="{3D85C73B-8746-43D2-B2DF-264E9B26874F}" type="datetime1">
               <a:rPr lang="de-DE" smtClean="0"/>
-              <a:t>16.04.2025</a:t>
+              <a:t>11.03.2026</a:t>
             </a:fld>
             <a:endParaRPr lang="de-DE" dirty="0"/>
           </a:p>
@@ -3614,7 +3620,7 @@
             </a:pPr>
             <a:fld id="{880D8169-47E9-4C41-A2C1-0ACE90524791}" type="datetime1">
               <a:rPr lang="de-DE" smtClean="0"/>
-              <a:t>16.04.2025</a:t>
+              <a:t>11.03.2026</a:t>
             </a:fld>
             <a:endParaRPr lang="de-DE" dirty="0"/>
           </a:p>
@@ -4071,7 +4077,7 @@
             </a:pPr>
             <a:fld id="{826AF04E-2C42-4D7D-9FA6-0895B2147FEF}" type="datetime1">
               <a:rPr lang="de-DE" smtClean="0"/>
-              <a:t>16.04.2025</a:t>
+              <a:t>11.03.2026</a:t>
             </a:fld>
             <a:endParaRPr lang="de-DE" dirty="0"/>
           </a:p>
@@ -4779,7 +4785,7 @@
             </a:pPr>
             <a:fld id="{7A2DC49A-64FA-4C3F-80F3-AF205E2A1F91}" type="datetime1">
               <a:rPr lang="de-DE" smtClean="0"/>
-              <a:t>16.04.2025</a:t>
+              <a:t>11.03.2026</a:t>
             </a:fld>
             <a:endParaRPr lang="de-DE" dirty="0"/>
           </a:p>
@@ -5112,7 +5118,7 @@
             </a:pPr>
             <a:fld id="{870C90F2-01D9-4AA5-A85C-27A63631B086}" type="datetime1">
               <a:rPr lang="de-DE" smtClean="0"/>
-              <a:t>16.04.2025</a:t>
+              <a:t>11.03.2026</a:t>
             </a:fld>
             <a:endParaRPr lang="de-DE" dirty="0"/>
           </a:p>
@@ -5223,7 +5229,7 @@
             </a:pPr>
             <a:fld id="{48251A07-1F74-4A98-82D5-CBD0DE5164A2}" type="datetime1">
               <a:rPr lang="de-DE" smtClean="0"/>
-              <a:t>16.04.2025</a:t>
+              <a:t>11.03.2026</a:t>
             </a:fld>
             <a:endParaRPr lang="de-DE" dirty="0"/>
           </a:p>
@@ -5364,7 +5370,7 @@
             </a:pPr>
             <a:fld id="{261FF7AE-E47F-48DC-9035-E2B5C6B71021}" type="datetime1">
               <a:rPr lang="de-DE" smtClean="0"/>
-              <a:t>16.04.2025</a:t>
+              <a:t>11.03.2026</a:t>
             </a:fld>
             <a:endParaRPr lang="de-DE" dirty="0"/>
           </a:p>
@@ -5661,7 +5667,7 @@
             </a:pPr>
             <a:fld id="{7C1E37B6-3E02-4C4C-884B-FC01FA70DD6A}" type="datetime1">
               <a:rPr lang="de-DE" smtClean="0"/>
-              <a:t>16.04.2025</a:t>
+              <a:t>11.03.2026</a:t>
             </a:fld>
             <a:endParaRPr lang="de-DE" dirty="0"/>
           </a:p>
@@ -6581,6 +6587,517 @@
     </p:otherStyle>
   </p:txStyles>
 </p:sldMaster>
+</file>
+
+<file path=ppt/slides/slide1.xml><?xml version="1.0" encoding="utf-8"?>
+<p:sld xmlns:a="http://schemas.openxmlformats.org/drawingml/2006/main" xmlns:r="http://schemas.openxmlformats.org/officeDocument/2006/relationships" xmlns:p="http://schemas.openxmlformats.org/presentationml/2006/main">
+  <p:cSld>
+    <p:spTree>
+      <p:nvGrpSpPr>
+        <p:cNvPr id="1" name=""/>
+        <p:cNvGrpSpPr/>
+        <p:nvPr/>
+      </p:nvGrpSpPr>
+      <p:grpSpPr>
+        <a:xfrm>
+          <a:off x="0" y="0"/>
+          <a:ext cx="0" cy="0"/>
+          <a:chOff x="0" y="0"/>
+          <a:chExt cx="0" cy="0"/>
+        </a:xfrm>
+      </p:grpSpPr>
+      <p:sp>
+        <p:nvSpPr>
+          <p:cNvPr id="2" name="Untertitel 1">
+            <a:extLst>
+              <a:ext uri="{FF2B5EF4-FFF2-40B4-BE49-F238E27FC236}">
+                <a16:creationId xmlns:a16="http://schemas.microsoft.com/office/drawing/2014/main" id="{F7E26FBC-236A-73A4-B234-98DF3C1FF6E2}"/>
+              </a:ext>
+            </a:extLst>
+          </p:cNvPr>
+          <p:cNvSpPr>
+            <a:spLocks noGrp="1"/>
+          </p:cNvSpPr>
+          <p:nvPr>
+            <p:ph type="subTitle" idx="1"/>
+          </p:nvPr>
+        </p:nvSpPr>
+        <p:spPr/>
+        <p:txBody>
+          <a:bodyPr/>
+          <a:lstStyle/>
+          <a:p>
+            <a:endParaRPr lang="de-DE"/>
+          </a:p>
+        </p:txBody>
+      </p:sp>
+      <p:sp>
+        <p:nvSpPr>
+          <p:cNvPr id="3" name="Titel 2">
+            <a:extLst>
+              <a:ext uri="{FF2B5EF4-FFF2-40B4-BE49-F238E27FC236}">
+                <a16:creationId xmlns:a16="http://schemas.microsoft.com/office/drawing/2014/main" id="{71D9A68A-2088-E3AE-7438-57AA982B2F57}"/>
+              </a:ext>
+            </a:extLst>
+          </p:cNvPr>
+          <p:cNvSpPr>
+            <a:spLocks noGrp="1"/>
+          </p:cNvSpPr>
+          <p:nvPr>
+            <p:ph type="ctrTitle" sz="quarter"/>
+          </p:nvPr>
+        </p:nvSpPr>
+        <p:spPr/>
+        <p:txBody>
+          <a:bodyPr/>
+          <a:lstStyle/>
+          <a:p>
+            <a:endParaRPr lang="de-DE"/>
+          </a:p>
+        </p:txBody>
+      </p:sp>
+    </p:spTree>
+    <p:extLst>
+      <p:ext uri="{BB962C8B-B14F-4D97-AF65-F5344CB8AC3E}">
+        <p14:creationId xmlns:p14="http://schemas.microsoft.com/office/powerpoint/2010/main" val="4055106026"/>
+      </p:ext>
+    </p:extLst>
+  </p:cSld>
+  <p:clrMapOvr>
+    <a:masterClrMapping/>
+  </p:clrMapOvr>
+</p:sld>
+</file>
+
+<file path=ppt/slides/slide2.xml><?xml version="1.0" encoding="utf-8"?>
+<p:sld xmlns:a="http://schemas.openxmlformats.org/drawingml/2006/main" xmlns:r="http://schemas.openxmlformats.org/officeDocument/2006/relationships" xmlns:p="http://schemas.openxmlformats.org/presentationml/2006/main">
+  <p:cSld>
+    <p:spTree>
+      <p:nvGrpSpPr>
+        <p:cNvPr id="1" name=""/>
+        <p:cNvGrpSpPr/>
+        <p:nvPr/>
+      </p:nvGrpSpPr>
+      <p:grpSpPr>
+        <a:xfrm>
+          <a:off x="0" y="0"/>
+          <a:ext cx="0" cy="0"/>
+          <a:chOff x="0" y="0"/>
+          <a:chExt cx="0" cy="0"/>
+        </a:xfrm>
+      </p:grpSpPr>
+      <p:sp>
+        <p:nvSpPr>
+          <p:cNvPr id="2" name="Untertitel 1">
+            <a:extLst>
+              <a:ext uri="{FF2B5EF4-FFF2-40B4-BE49-F238E27FC236}">
+                <a16:creationId xmlns:a16="http://schemas.microsoft.com/office/drawing/2014/main" id="{78C49665-92A4-175E-3B79-4AF9BA41541E}"/>
+              </a:ext>
+            </a:extLst>
+          </p:cNvPr>
+          <p:cNvSpPr>
+            <a:spLocks noGrp="1"/>
+          </p:cNvSpPr>
+          <p:nvPr>
+            <p:ph type="subTitle" idx="1"/>
+          </p:nvPr>
+        </p:nvSpPr>
+        <p:spPr/>
+        <p:txBody>
+          <a:bodyPr/>
+          <a:lstStyle/>
+          <a:p>
+            <a:endParaRPr lang="de-DE"/>
+          </a:p>
+        </p:txBody>
+      </p:sp>
+      <p:sp>
+        <p:nvSpPr>
+          <p:cNvPr id="3" name="Titel 2">
+            <a:extLst>
+              <a:ext uri="{FF2B5EF4-FFF2-40B4-BE49-F238E27FC236}">
+                <a16:creationId xmlns:a16="http://schemas.microsoft.com/office/drawing/2014/main" id="{9B80D9B9-5D0F-F5F1-26CC-A95D08C75AFF}"/>
+              </a:ext>
+            </a:extLst>
+          </p:cNvPr>
+          <p:cNvSpPr>
+            <a:spLocks noGrp="1"/>
+          </p:cNvSpPr>
+          <p:nvPr>
+            <p:ph type="ctrTitle" sz="quarter"/>
+          </p:nvPr>
+        </p:nvSpPr>
+        <p:spPr/>
+        <p:txBody>
+          <a:bodyPr/>
+          <a:lstStyle/>
+          <a:p>
+            <a:endParaRPr lang="de-DE"/>
+          </a:p>
+        </p:txBody>
+      </p:sp>
+      <p:sp>
+        <p:nvSpPr>
+          <p:cNvPr id="4" name="Bildplatzhalter 3">
+            <a:extLst>
+              <a:ext uri="{FF2B5EF4-FFF2-40B4-BE49-F238E27FC236}">
+                <a16:creationId xmlns:a16="http://schemas.microsoft.com/office/drawing/2014/main" id="{5E295833-8D44-8332-18E7-6B563707F10F}"/>
+              </a:ext>
+            </a:extLst>
+          </p:cNvPr>
+          <p:cNvSpPr>
+            <a:spLocks noGrp="1"/>
+          </p:cNvSpPr>
+          <p:nvPr>
+            <p:ph type="pic" sz="quarter" idx="10"/>
+          </p:nvPr>
+        </p:nvSpPr>
+        <p:spPr/>
+      </p:sp>
+    </p:spTree>
+    <p:extLst>
+      <p:ext uri="{BB962C8B-B14F-4D97-AF65-F5344CB8AC3E}">
+        <p14:creationId xmlns:p14="http://schemas.microsoft.com/office/powerpoint/2010/main" val="3061962376"/>
+      </p:ext>
+    </p:extLst>
+  </p:cSld>
+  <p:clrMapOvr>
+    <a:masterClrMapping/>
+  </p:clrMapOvr>
+</p:sld>
+</file>
+
+<file path=ppt/slides/slide3.xml><?xml version="1.0" encoding="utf-8"?>
+<p:sld xmlns:a="http://schemas.openxmlformats.org/drawingml/2006/main" xmlns:r="http://schemas.openxmlformats.org/officeDocument/2006/relationships" xmlns:p="http://schemas.openxmlformats.org/presentationml/2006/main">
+  <p:cSld>
+    <p:spTree>
+      <p:nvGrpSpPr>
+        <p:cNvPr id="1" name=""/>
+        <p:cNvGrpSpPr/>
+        <p:nvPr/>
+      </p:nvGrpSpPr>
+      <p:grpSpPr>
+        <a:xfrm>
+          <a:off x="0" y="0"/>
+          <a:ext cx="0" cy="0"/>
+          <a:chOff x="0" y="0"/>
+          <a:chExt cx="0" cy="0"/>
+        </a:xfrm>
+      </p:grpSpPr>
+      <p:sp>
+        <p:nvSpPr>
+          <p:cNvPr id="2" name="Titel 1">
+            <a:extLst>
+              <a:ext uri="{FF2B5EF4-FFF2-40B4-BE49-F238E27FC236}">
+                <a16:creationId xmlns:a16="http://schemas.microsoft.com/office/drawing/2014/main" id="{80434BD1-BE86-4240-9DC7-FD988E919041}"/>
+              </a:ext>
+            </a:extLst>
+          </p:cNvPr>
+          <p:cNvSpPr>
+            <a:spLocks noGrp="1"/>
+          </p:cNvSpPr>
+          <p:nvPr>
+            <p:ph type="title"/>
+          </p:nvPr>
+        </p:nvSpPr>
+        <p:spPr/>
+        <p:txBody>
+          <a:bodyPr/>
+          <a:lstStyle/>
+          <a:p>
+            <a:endParaRPr lang="de-DE"/>
+          </a:p>
+        </p:txBody>
+      </p:sp>
+      <p:sp>
+        <p:nvSpPr>
+          <p:cNvPr id="3" name="Datumsplatzhalter 2">
+            <a:extLst>
+              <a:ext uri="{FF2B5EF4-FFF2-40B4-BE49-F238E27FC236}">
+                <a16:creationId xmlns:a16="http://schemas.microsoft.com/office/drawing/2014/main" id="{6A4374C2-55B8-1F95-5637-BC6B87EDADD2}"/>
+              </a:ext>
+            </a:extLst>
+          </p:cNvPr>
+          <p:cNvSpPr>
+            <a:spLocks noGrp="1"/>
+          </p:cNvSpPr>
+          <p:nvPr>
+            <p:ph type="dt" sz="quarter" idx="10"/>
+          </p:nvPr>
+        </p:nvSpPr>
+        <p:spPr/>
+        <p:txBody>
+          <a:bodyPr/>
+          <a:lstStyle/>
+          <a:p>
+            <a:pPr>
+              <a:defRPr/>
+            </a:pPr>
+            <a:fld id="{880D8169-47E9-4C41-A2C1-0ACE90524791}" type="datetime1">
+              <a:rPr lang="de-DE" smtClean="0"/>
+              <a:t>11.03.2026</a:t>
+            </a:fld>
+            <a:endParaRPr lang="de-DE" dirty="0"/>
+          </a:p>
+        </p:txBody>
+      </p:sp>
+      <p:sp>
+        <p:nvSpPr>
+          <p:cNvPr id="4" name="Fußzeilenplatzhalter 3">
+            <a:extLst>
+              <a:ext uri="{FF2B5EF4-FFF2-40B4-BE49-F238E27FC236}">
+                <a16:creationId xmlns:a16="http://schemas.microsoft.com/office/drawing/2014/main" id="{7EA54849-089E-DD80-13AF-A204D1B5F08E}"/>
+              </a:ext>
+            </a:extLst>
+          </p:cNvPr>
+          <p:cNvSpPr>
+            <a:spLocks noGrp="1"/>
+          </p:cNvSpPr>
+          <p:nvPr>
+            <p:ph type="ftr" sz="quarter" idx="11"/>
+          </p:nvPr>
+        </p:nvSpPr>
+        <p:spPr/>
+        <p:txBody>
+          <a:bodyPr/>
+          <a:lstStyle/>
+          <a:p>
+            <a:pPr algn="r">
+              <a:defRPr/>
+            </a:pPr>
+            <a:r>
+              <a:rPr lang="de-DE"/>
+              <a:t>Fußzeile mit weiteren Hinweisen </a:t>
+            </a:r>
+            <a:endParaRPr lang="de-DE" dirty="0"/>
+          </a:p>
+        </p:txBody>
+      </p:sp>
+      <p:sp>
+        <p:nvSpPr>
+          <p:cNvPr id="5" name="Foliennummernplatzhalter 4">
+            <a:extLst>
+              <a:ext uri="{FF2B5EF4-FFF2-40B4-BE49-F238E27FC236}">
+                <a16:creationId xmlns:a16="http://schemas.microsoft.com/office/drawing/2014/main" id="{72AB6470-1193-7B27-525F-EF45B83FBAEE}"/>
+              </a:ext>
+            </a:extLst>
+          </p:cNvPr>
+          <p:cNvSpPr>
+            <a:spLocks noGrp="1"/>
+          </p:cNvSpPr>
+          <p:nvPr>
+            <p:ph type="sldNum" sz="quarter" idx="12"/>
+          </p:nvPr>
+        </p:nvSpPr>
+        <p:spPr/>
+        <p:txBody>
+          <a:bodyPr/>
+          <a:lstStyle/>
+          <a:p>
+            <a:pPr>
+              <a:defRPr/>
+            </a:pPr>
+            <a:fld id="{EF82B18D-C707-4786-8163-FFCD341314AB}" type="slidenum">
+              <a:rPr lang="de-DE" smtClean="0"/>
+              <a:pPr>
+                <a:defRPr/>
+              </a:pPr>
+              <a:t>3</a:t>
+            </a:fld>
+            <a:endParaRPr lang="de-DE" dirty="0"/>
+          </a:p>
+        </p:txBody>
+      </p:sp>
+      <p:sp>
+        <p:nvSpPr>
+          <p:cNvPr id="6" name="Inhaltsplatzhalter 5">
+            <a:extLst>
+              <a:ext uri="{FF2B5EF4-FFF2-40B4-BE49-F238E27FC236}">
+                <a16:creationId xmlns:a16="http://schemas.microsoft.com/office/drawing/2014/main" id="{6F4BF8E4-E905-6D04-E8F1-587D8E69CCCF}"/>
+              </a:ext>
+            </a:extLst>
+          </p:cNvPr>
+          <p:cNvSpPr>
+            <a:spLocks noGrp="1"/>
+          </p:cNvSpPr>
+          <p:nvPr>
+            <p:ph idx="1"/>
+          </p:nvPr>
+        </p:nvSpPr>
+        <p:spPr/>
+        <p:txBody>
+          <a:bodyPr/>
+          <a:lstStyle/>
+          <a:p>
+            <a:endParaRPr lang="de-DE"/>
+          </a:p>
+        </p:txBody>
+      </p:sp>
+    </p:spTree>
+    <p:extLst>
+      <p:ext uri="{BB962C8B-B14F-4D97-AF65-F5344CB8AC3E}">
+        <p14:creationId xmlns:p14="http://schemas.microsoft.com/office/powerpoint/2010/main" val="1815457138"/>
+      </p:ext>
+    </p:extLst>
+  </p:cSld>
+  <p:clrMapOvr>
+    <a:masterClrMapping/>
+  </p:clrMapOvr>
+</p:sld>
+</file>
+
+<file path=ppt/slides/slide4.xml><?xml version="1.0" encoding="utf-8"?>
+<p:sld xmlns:a="http://schemas.openxmlformats.org/drawingml/2006/main" xmlns:r="http://schemas.openxmlformats.org/officeDocument/2006/relationships" xmlns:p="http://schemas.openxmlformats.org/presentationml/2006/main">
+  <p:cSld>
+    <p:spTree>
+      <p:nvGrpSpPr>
+        <p:cNvPr id="1" name=""/>
+        <p:cNvGrpSpPr/>
+        <p:nvPr/>
+      </p:nvGrpSpPr>
+      <p:grpSpPr>
+        <a:xfrm>
+          <a:off x="0" y="0"/>
+          <a:ext cx="0" cy="0"/>
+          <a:chOff x="0" y="0"/>
+          <a:chExt cx="0" cy="0"/>
+        </a:xfrm>
+      </p:grpSpPr>
+      <p:sp>
+        <p:nvSpPr>
+          <p:cNvPr id="2" name="Titel 1">
+            <a:extLst>
+              <a:ext uri="{FF2B5EF4-FFF2-40B4-BE49-F238E27FC236}">
+                <a16:creationId xmlns:a16="http://schemas.microsoft.com/office/drawing/2014/main" id="{6D0489EB-777A-7E31-4D97-BBF43CCFFCEF}"/>
+              </a:ext>
+            </a:extLst>
+          </p:cNvPr>
+          <p:cNvSpPr>
+            <a:spLocks noGrp="1"/>
+          </p:cNvSpPr>
+          <p:nvPr>
+            <p:ph type="title"/>
+          </p:nvPr>
+        </p:nvSpPr>
+        <p:spPr/>
+        <p:txBody>
+          <a:bodyPr/>
+          <a:lstStyle/>
+          <a:p>
+            <a:endParaRPr lang="de-DE"/>
+          </a:p>
+        </p:txBody>
+      </p:sp>
+      <p:sp>
+        <p:nvSpPr>
+          <p:cNvPr id="3" name="Datumsplatzhalter 2">
+            <a:extLst>
+              <a:ext uri="{FF2B5EF4-FFF2-40B4-BE49-F238E27FC236}">
+                <a16:creationId xmlns:a16="http://schemas.microsoft.com/office/drawing/2014/main" id="{B0FDDEFD-1B82-92D5-07F2-FBF96CBDBFE0}"/>
+              </a:ext>
+            </a:extLst>
+          </p:cNvPr>
+          <p:cNvSpPr>
+            <a:spLocks noGrp="1"/>
+          </p:cNvSpPr>
+          <p:nvPr>
+            <p:ph type="dt" sz="quarter" idx="10"/>
+          </p:nvPr>
+        </p:nvSpPr>
+        <p:spPr/>
+        <p:txBody>
+          <a:bodyPr/>
+          <a:lstStyle/>
+          <a:p>
+            <a:pPr>
+              <a:defRPr/>
+            </a:pPr>
+            <a:fld id="{870C90F2-01D9-4AA5-A85C-27A63631B086}" type="datetime1">
+              <a:rPr lang="de-DE" smtClean="0"/>
+              <a:t>11.03.2026</a:t>
+            </a:fld>
+            <a:endParaRPr lang="de-DE" dirty="0"/>
+          </a:p>
+        </p:txBody>
+      </p:sp>
+      <p:sp>
+        <p:nvSpPr>
+          <p:cNvPr id="4" name="Fußzeilenplatzhalter 3">
+            <a:extLst>
+              <a:ext uri="{FF2B5EF4-FFF2-40B4-BE49-F238E27FC236}">
+                <a16:creationId xmlns:a16="http://schemas.microsoft.com/office/drawing/2014/main" id="{90D112CE-B33F-FF70-4EB5-3F4793665B37}"/>
+              </a:ext>
+            </a:extLst>
+          </p:cNvPr>
+          <p:cNvSpPr>
+            <a:spLocks noGrp="1"/>
+          </p:cNvSpPr>
+          <p:nvPr>
+            <p:ph type="ftr" sz="quarter" idx="11"/>
+          </p:nvPr>
+        </p:nvSpPr>
+        <p:spPr/>
+        <p:txBody>
+          <a:bodyPr/>
+          <a:lstStyle/>
+          <a:p>
+            <a:pPr algn="r">
+              <a:defRPr/>
+            </a:pPr>
+            <a:r>
+              <a:rPr lang="de-DE"/>
+              <a:t>Fußzeile mit weiteren Hinweisen </a:t>
+            </a:r>
+            <a:endParaRPr lang="de-DE" dirty="0"/>
+          </a:p>
+        </p:txBody>
+      </p:sp>
+      <p:sp>
+        <p:nvSpPr>
+          <p:cNvPr id="5" name="Foliennummernplatzhalter 4">
+            <a:extLst>
+              <a:ext uri="{FF2B5EF4-FFF2-40B4-BE49-F238E27FC236}">
+                <a16:creationId xmlns:a16="http://schemas.microsoft.com/office/drawing/2014/main" id="{1CE83064-A2B9-3591-F258-3D75A4B4EA04}"/>
+              </a:ext>
+            </a:extLst>
+          </p:cNvPr>
+          <p:cNvSpPr>
+            <a:spLocks noGrp="1"/>
+          </p:cNvSpPr>
+          <p:nvPr>
+            <p:ph type="sldNum" sz="quarter" idx="12"/>
+          </p:nvPr>
+        </p:nvSpPr>
+        <p:spPr/>
+        <p:txBody>
+          <a:bodyPr/>
+          <a:lstStyle/>
+          <a:p>
+            <a:pPr>
+              <a:defRPr/>
+            </a:pPr>
+            <a:fld id="{EF82B18D-C707-4786-8163-FFCD341314AB}" type="slidenum">
+              <a:rPr lang="de-DE" smtClean="0"/>
+              <a:pPr>
+                <a:defRPr/>
+              </a:pPr>
+              <a:t>4</a:t>
+            </a:fld>
+            <a:endParaRPr lang="de-DE" dirty="0"/>
+          </a:p>
+        </p:txBody>
+      </p:sp>
+    </p:spTree>
+    <p:extLst>
+      <p:ext uri="{BB962C8B-B14F-4D97-AF65-F5344CB8AC3E}">
+        <p14:creationId xmlns:p14="http://schemas.microsoft.com/office/powerpoint/2010/main" val="2085664447"/>
+      </p:ext>
+    </p:extLst>
+  </p:cSld>
+  <p:clrMapOvr>
+    <a:masterClrMapping/>
+  </p:clrMapOvr>
+</p:sld>
 </file>
 
 <file path=ppt/theme/theme1.xml><?xml version="1.0" encoding="utf-8"?>
@@ -7756,6 +8273,21 @@
 </file>
 
 <file path=customXml/item1.xml><?xml version="1.0" encoding="utf-8"?>
+<?mso-contentType ?>
+<FormTemplates xmlns="http://schemas.microsoft.com/sharepoint/v3/contenttype/forms">
+  <Display>DocumentLibraryForm</Display>
+  <Edit>DocumentLibraryForm</Edit>
+  <New>DocumentLibraryForm</New>
+</FormTemplates>
+</file>
+
+<file path=customXml/item2.xml><?xml version="1.0" encoding="utf-8"?>
+<p:properties xmlns:p="http://schemas.microsoft.com/office/2006/metadata/properties" xmlns:xsi="http://www.w3.org/2001/XMLSchema-instance" xmlns:pc="http://schemas.microsoft.com/office/infopath/2007/PartnerControls">
+  <documentManagement/>
+</p:properties>
+</file>
+
+<file path=customXml/item3.xml><?xml version="1.0" encoding="utf-8"?>
 <ct:contentTypeSchema xmlns:ct="http://schemas.microsoft.com/office/2006/metadata/contentType" xmlns:ma="http://schemas.microsoft.com/office/2006/metadata/properties/metaAttributes" ct:_="" ma:_="" ma:contentTypeName="Dokument" ma:contentTypeID="0x0101000057EFD54097B4438E7A80F3D1373265" ma:contentTypeVersion="1" ma:contentTypeDescription="Ein neues Dokument erstellen." ma:contentTypeScope="" ma:versionID="834bd551b14fcde88a9c6a4a0bf530df">
   <xsd:schema xmlns:xsd="http://www.w3.org/2001/XMLSchema" xmlns:xs="http://www.w3.org/2001/XMLSchema" xmlns:p="http://schemas.microsoft.com/office/2006/metadata/properties" xmlns:ns2="8637de2c-6bc0-411d-bf65-aa36b7f9c66d" targetNamespace="http://schemas.microsoft.com/office/2006/metadata/properties" ma:root="true" ma:fieldsID="e455fcda4cde3aa6122f413ba46336a9" ns2:_="">
     <xsd:import namespace="8637de2c-6bc0-411d-bf65-aa36b7f9c66d"/>
@@ -7895,44 +8427,44 @@
 </ct:contentTypeSchema>
 </file>
 
-<file path=customXml/item2.xml><?xml version="1.0" encoding="utf-8"?>
-<p:properties xmlns:p="http://schemas.microsoft.com/office/2006/metadata/properties" xmlns:xsi="http://www.w3.org/2001/XMLSchema-instance" xmlns:pc="http://schemas.microsoft.com/office/infopath/2007/PartnerControls">
-  <documentManagement/>
-</p:properties>
-</file>
-
-<file path=customXml/item3.xml><?xml version="1.0" encoding="utf-8"?>
-<?mso-contentType ?>
-<FormTemplates xmlns="http://schemas.microsoft.com/sharepoint/v3/contenttype/forms">
-  <Display>DocumentLibraryForm</Display>
-  <Edit>DocumentLibraryForm</Edit>
-  <New>DocumentLibraryForm</New>
-</FormTemplates>
-</file>
-
 <file path=customXml/itemProps1.xml><?xml version="1.0" encoding="utf-8"?>
-<ds:datastoreItem xmlns:ds="http://schemas.openxmlformats.org/officeDocument/2006/customXml" ds:itemID="{E81B246F-A24C-4FF5-9599-4E67AE3D4661}"/>
+<ds:datastoreItem xmlns:ds="http://schemas.openxmlformats.org/officeDocument/2006/customXml" ds:itemID="{8D209D72-484E-46E5-8AF5-E4C907679F90}">
+  <ds:schemaRefs>
+    <ds:schemaRef ds:uri="http://schemas.microsoft.com/sharepoint/v3/contenttype/forms"/>
+  </ds:schemaRefs>
+</ds:datastoreItem>
 </file>
 
 <file path=customXml/itemProps2.xml><?xml version="1.0" encoding="utf-8"?>
 <ds:datastoreItem xmlns:ds="http://schemas.openxmlformats.org/officeDocument/2006/customXml" ds:itemID="{A00017A1-94BC-4394-9852-7E0A4C91927E}">
   <ds:schemaRefs>
+    <ds:schemaRef ds:uri="http://purl.org/dc/terms/"/>
+    <ds:schemaRef ds:uri="8637de2c-6bc0-411d-bf65-aa36b7f9c66d"/>
+    <ds:schemaRef ds:uri="http://schemas.openxmlformats.org/package/2006/metadata/core-properties"/>
+    <ds:schemaRef ds:uri="http://schemas.microsoft.com/office/infopath/2007/PartnerControls"/>
     <ds:schemaRef ds:uri="http://schemas.microsoft.com/office/2006/metadata/properties"/>
-    <ds:schemaRef ds:uri="http://purl.org/dc/terms/"/>
-    <ds:schemaRef ds:uri="http://schemas.openxmlformats.org/package/2006/metadata/core-properties"/>
+    <ds:schemaRef ds:uri="http://purl.org/dc/elements/1.1/"/>
     <ds:schemaRef ds:uri="http://schemas.microsoft.com/office/2006/documentManagement/types"/>
-    <ds:schemaRef ds:uri="http://schemas.microsoft.com/office/infopath/2007/PartnerControls"/>
-    <ds:schemaRef ds:uri="http://purl.org/dc/elements/1.1/"/>
+    <ds:schemaRef ds:uri="http://purl.org/dc/dcmitype/"/>
     <ds:schemaRef ds:uri="http://www.w3.org/XML/1998/namespace"/>
-    <ds:schemaRef ds:uri="http://purl.org/dc/dcmitype/"/>
   </ds:schemaRefs>
 </ds:datastoreItem>
 </file>
 
 <file path=customXml/itemProps3.xml><?xml version="1.0" encoding="utf-8"?>
-<ds:datastoreItem xmlns:ds="http://schemas.openxmlformats.org/officeDocument/2006/customXml" ds:itemID="{8D209D72-484E-46E5-8AF5-E4C907679F90}">
+<ds:datastoreItem xmlns:ds="http://schemas.openxmlformats.org/officeDocument/2006/customXml" ds:itemID="{E81B246F-A24C-4FF5-9599-4E67AE3D4661}">
   <ds:schemaRefs>
-    <ds:schemaRef ds:uri="http://schemas.microsoft.com/sharepoint/v3/contenttype/forms"/>
+    <ds:schemaRef ds:uri="http://schemas.microsoft.com/office/2006/metadata/contentType"/>
+    <ds:schemaRef ds:uri="http://schemas.microsoft.com/office/2006/metadata/properties/metaAttributes"/>
+    <ds:schemaRef ds:uri="http://www.w3.org/2001/XMLSchema"/>
+    <ds:schemaRef ds:uri="http://schemas.microsoft.com/office/2006/metadata/properties"/>
+    <ds:schemaRef ds:uri="8637de2c-6bc0-411d-bf65-aa36b7f9c66d"/>
+    <ds:schemaRef ds:uri="http://schemas.microsoft.com/office/2006/documentManagement/types"/>
+    <ds:schemaRef ds:uri="http://schemas.microsoft.com/office/infopath/2007/PartnerControls"/>
+    <ds:schemaRef ds:uri="http://schemas.openxmlformats.org/package/2006/metadata/core-properties"/>
+    <ds:schemaRef ds:uri="http://purl.org/dc/elements/1.1/"/>
+    <ds:schemaRef ds:uri="http://purl.org/dc/terms/"/>
+    <ds:schemaRef ds:uri="http://schemas.microsoft.com/internal/obd"/>
   </ds:schemaRefs>
 </ds:datastoreItem>
 </file>